--- a/deep_learning/3_RNN_NLP/NLP1-Applications-TopicModelling.pptx
+++ b/deep_learning/3_RNN_NLP/NLP1-Applications-TopicModelling.pptx
@@ -478,7 +478,7 @@
           <a:p>
             <a:fld id="{3069F3E5-9A8D-4E6D-9702-4B92AE7BFC47}" type="datetimeFigureOut">
               <a:rPr lang="en-US" smtClean="0"/>
-              <a:t>5/16/2025</a:t>
+              <a:t>4/19/2026</a:t>
             </a:fld>
             <a:endParaRPr lang="en-US"/>
           </a:p>
@@ -646,7 +646,7 @@
           <a:p>
             <a:fld id="{3069F3E5-9A8D-4E6D-9702-4B92AE7BFC47}" type="datetimeFigureOut">
               <a:rPr lang="en-US" smtClean="0"/>
-              <a:t>5/16/2025</a:t>
+              <a:t>4/19/2026</a:t>
             </a:fld>
             <a:endParaRPr lang="en-US"/>
           </a:p>
@@ -824,7 +824,7 @@
           <a:p>
             <a:fld id="{3069F3E5-9A8D-4E6D-9702-4B92AE7BFC47}" type="datetimeFigureOut">
               <a:rPr lang="en-US" smtClean="0"/>
-              <a:t>5/16/2025</a:t>
+              <a:t>4/19/2026</a:t>
             </a:fld>
             <a:endParaRPr lang="en-US"/>
           </a:p>
@@ -992,7 +992,7 @@
           <a:p>
             <a:fld id="{3069F3E5-9A8D-4E6D-9702-4B92AE7BFC47}" type="datetimeFigureOut">
               <a:rPr lang="en-US" smtClean="0"/>
-              <a:t>5/16/2025</a:t>
+              <a:t>4/19/2026</a:t>
             </a:fld>
             <a:endParaRPr lang="en-US"/>
           </a:p>
@@ -1237,7 +1237,7 @@
           <a:p>
             <a:fld id="{3069F3E5-9A8D-4E6D-9702-4B92AE7BFC47}" type="datetimeFigureOut">
               <a:rPr lang="en-US" smtClean="0"/>
-              <a:t>5/16/2025</a:t>
+              <a:t>4/19/2026</a:t>
             </a:fld>
             <a:endParaRPr lang="en-US"/>
           </a:p>
@@ -1466,7 +1466,7 @@
           <a:p>
             <a:fld id="{3069F3E5-9A8D-4E6D-9702-4B92AE7BFC47}" type="datetimeFigureOut">
               <a:rPr lang="en-US" smtClean="0"/>
-              <a:t>5/16/2025</a:t>
+              <a:t>4/19/2026</a:t>
             </a:fld>
             <a:endParaRPr lang="en-US"/>
           </a:p>
@@ -1830,7 +1830,7 @@
           <a:p>
             <a:fld id="{3069F3E5-9A8D-4E6D-9702-4B92AE7BFC47}" type="datetimeFigureOut">
               <a:rPr lang="en-US" smtClean="0"/>
-              <a:t>5/16/2025</a:t>
+              <a:t>4/19/2026</a:t>
             </a:fld>
             <a:endParaRPr lang="en-US"/>
           </a:p>
@@ -1947,7 +1947,7 @@
           <a:p>
             <a:fld id="{3069F3E5-9A8D-4E6D-9702-4B92AE7BFC47}" type="datetimeFigureOut">
               <a:rPr lang="en-US" smtClean="0"/>
-              <a:t>5/16/2025</a:t>
+              <a:t>4/19/2026</a:t>
             </a:fld>
             <a:endParaRPr lang="en-US"/>
           </a:p>
@@ -2042,7 +2042,7 @@
           <a:p>
             <a:fld id="{3069F3E5-9A8D-4E6D-9702-4B92AE7BFC47}" type="datetimeFigureOut">
               <a:rPr lang="en-US" smtClean="0"/>
-              <a:t>5/16/2025</a:t>
+              <a:t>4/19/2026</a:t>
             </a:fld>
             <a:endParaRPr lang="en-US"/>
           </a:p>
@@ -2317,7 +2317,7 @@
           <a:p>
             <a:fld id="{3069F3E5-9A8D-4E6D-9702-4B92AE7BFC47}" type="datetimeFigureOut">
               <a:rPr lang="en-US" smtClean="0"/>
-              <a:t>5/16/2025</a:t>
+              <a:t>4/19/2026</a:t>
             </a:fld>
             <a:endParaRPr lang="en-US"/>
           </a:p>
@@ -2569,7 +2569,7 @@
           <a:p>
             <a:fld id="{3069F3E5-9A8D-4E6D-9702-4B92AE7BFC47}" type="datetimeFigureOut">
               <a:rPr lang="en-US" smtClean="0"/>
-              <a:t>5/16/2025</a:t>
+              <a:t>4/19/2026</a:t>
             </a:fld>
             <a:endParaRPr lang="en-US"/>
           </a:p>
@@ -2780,7 +2780,7 @@
           <a:p>
             <a:fld id="{3069F3E5-9A8D-4E6D-9702-4B92AE7BFC47}" type="datetimeFigureOut">
               <a:rPr lang="en-US" smtClean="0"/>
-              <a:t>5/16/2025</a:t>
+              <a:t>4/19/2026</a:t>
             </a:fld>
             <a:endParaRPr lang="en-US"/>
           </a:p>
@@ -3529,27 +3529,7 @@
                 <a:effectLst/>
                 <a:latin typeface="Inter"/>
               </a:rPr>
-              <a:t>The LSA is considered the pioneer </a:t>
-            </a:r>
-            <a:r>
-              <a:rPr lang="en-US" b="0" i="0" dirty="0" smtClean="0">
-                <a:solidFill>
-                  <a:srgbClr val="383838"/>
-                </a:solidFill>
-                <a:effectLst/>
-                <a:latin typeface="Inter"/>
-              </a:rPr>
-              <a:t>for Dimensionality </a:t>
-            </a:r>
-            <a:r>
-              <a:rPr lang="en-US" b="0" i="0" dirty="0">
-                <a:solidFill>
-                  <a:srgbClr val="383838"/>
-                </a:solidFill>
-                <a:effectLst/>
-                <a:latin typeface="Inter"/>
-              </a:rPr>
-              <a:t>Reduction algorithms.</a:t>
+              <a:t>The LSA is considered the pioneer for Dimensionality Reduction algorithms.</a:t>
             </a:r>
           </a:p>
           <a:p>
@@ -3695,21 +3675,16 @@
           <a:p>
             <a:r>
               <a:rPr lang="en-US" sz="3200" b="1" dirty="0"/>
-              <a:t>Topic Modelling Techniques: </a:t>
-            </a:r>
-            <a:r>
-              <a:rPr lang="en-US" sz="3200" b="1" dirty="0" smtClean="0"/>
-              <a:t>LDA(see </a:t>
-            </a:r>
-            <a:r>
-              <a:rPr lang="en-US" sz="3200" b="1" dirty="0" err="1" smtClean="0"/>
+              <a:t>Topic Modelling Techniques: LDA(see </a:t>
+            </a:r>
+            <a:r>
+              <a:rPr lang="en-US" sz="3200" b="1" dirty="0" err="1"/>
               <a:t>jupyter</a:t>
             </a:r>
             <a:r>
-              <a:rPr lang="en-US" sz="3200" b="1" dirty="0" smtClean="0"/>
+              <a:rPr lang="en-US" sz="3200" b="1" dirty="0"/>
               <a:t> n/b)</a:t>
             </a:r>
-            <a:endParaRPr lang="en-US" sz="3200" b="1" dirty="0"/>
           </a:p>
         </p:txBody>
       </p:sp>
@@ -3736,28 +3711,16 @@
           <a:lstStyle/>
           <a:p>
             <a:r>
-              <a:rPr lang="en-US" dirty="0" smtClean="0"/>
+              <a:rPr lang="en-US" dirty="0"/>
               <a:t>Some interesting source: </a:t>
-            </a:r>
-            <a:r>
-              <a:rPr lang="en-US" dirty="0" smtClean="0">
-                <a:hlinkClick r:id="rId2"/>
-              </a:rPr>
-              <a:t>https</a:t>
             </a:r>
             <a:r>
               <a:rPr lang="en-US" dirty="0">
                 <a:hlinkClick r:id="rId2"/>
               </a:rPr>
-              <a:t>://towardsdatascience.com/light-on-math-machine-learning-intuitive-guide-to-latent-dirichlet-allocation-437c81220158</a:t>
-            </a:r>
-            <a:r>
-              <a:rPr lang="en-US" dirty="0" smtClean="0">
-                <a:hlinkClick r:id="rId2"/>
-              </a:rPr>
-              <a:t>/</a:t>
-            </a:r>
-            <a:endParaRPr lang="en-US" dirty="0" smtClean="0"/>
+              <a:t>https://towardsdatascience.com/light-on-math-machine-learning-intuitive-guide-to-latent-dirichlet-allocation-437c81220158/</a:t>
+            </a:r>
+            <a:endParaRPr lang="en-US" dirty="0"/>
           </a:p>
           <a:p>
             <a:r>
@@ -3767,12 +3730,8 @@
           </a:p>
           <a:p>
             <a:r>
-              <a:rPr lang="en-US" dirty="0" smtClean="0"/>
-              <a:t>LDA </a:t>
-            </a:r>
-            <a:r>
               <a:rPr lang="en-US" dirty="0"/>
-              <a:t>is a generative probabilistic model that leverages Bayesian inference to find the underlying topics in a corpus of texts. It assumes each document is a combination of a small number of latent topics, and each word is generated by a particular topic.</a:t>
+              <a:t>LDA is a generative probabilistic model that leverages Bayesian inference to find the underlying topics in a corpus of texts. It assumes each document is a combination of a small number of latent topics, and each word is generated by a particular topic.</a:t>
             </a:r>
           </a:p>
         </p:txBody>
@@ -3831,13 +3790,8 @@
           <a:p>
             <a:r>
               <a:rPr lang="en-US" sz="3200" b="1" dirty="0"/>
-              <a:t>Topic Modelling Techniques: </a:t>
-            </a:r>
-            <a:r>
-              <a:rPr lang="en-US" sz="3200" b="1" dirty="0" smtClean="0"/>
-              <a:t>LDA</a:t>
-            </a:r>
-            <a:endParaRPr lang="en-US" sz="3200" b="1" dirty="0"/>
+              <a:t>Topic Modelling Techniques: LDA</a:t>
+            </a:r>
           </a:p>
         </p:txBody>
       </p:sp>
@@ -3993,13 +3947,6 @@
   <p:clrMapOvr>
     <a:masterClrMapping/>
   </p:clrMapOvr>
-  <p:timing>
-    <p:tnLst>
-      <p:par>
-        <p:cTn id="1" dur="indefinite" restart="never" nodeType="tmRoot"/>
-      </p:par>
-    </p:tnLst>
-  </p:timing>
 </p:sld>
 </file>
 
@@ -4120,25 +4067,6 @@
       </p:grpSpPr>
       <p:sp>
         <p:nvSpPr>
-          <p:cNvPr id="2" name="Title 1"/>
-          <p:cNvSpPr>
-            <a:spLocks noGrp="1"/>
-          </p:cNvSpPr>
-          <p:nvPr>
-            <p:ph type="title"/>
-          </p:nvPr>
-        </p:nvSpPr>
-        <p:spPr/>
-        <p:txBody>
-          <a:bodyPr/>
-          <a:lstStyle/>
-          <a:p>
-            <a:endParaRPr lang="en-US"/>
-          </a:p>
-        </p:txBody>
-      </p:sp>
-      <p:sp>
-        <p:nvSpPr>
           <p:cNvPr id="3" name="Content Placeholder 2"/>
           <p:cNvSpPr>
             <a:spLocks noGrp="1"/>
@@ -4522,21 +4450,16 @@
           <a:p>
             <a:r>
               <a:rPr lang="en-US" sz="3200" dirty="0"/>
-              <a:t>Topic Modelling Techniques: </a:t>
-            </a:r>
-            <a:r>
-              <a:rPr lang="en-US" sz="3200" dirty="0" smtClean="0"/>
-              <a:t>LSA(see </a:t>
-            </a:r>
-            <a:r>
-              <a:rPr lang="en-US" sz="3200" dirty="0" err="1" smtClean="0"/>
+              <a:t>Topic Modelling Techniques: LSA(see </a:t>
+            </a:r>
+            <a:r>
+              <a:rPr lang="en-US" sz="3200" dirty="0" err="1"/>
               <a:t>jupyter</a:t>
             </a:r>
             <a:r>
-              <a:rPr lang="en-US" sz="3200" dirty="0" smtClean="0"/>
+              <a:rPr lang="en-US" sz="3200" dirty="0"/>
               <a:t> n/b)</a:t>
             </a:r>
-            <a:endParaRPr lang="en-US" sz="3200" dirty="0"/>
           </a:p>
         </p:txBody>
       </p:sp>
